--- a/assets/Quarterly_Deck.pptx
+++ b/assets/Quarterly_Deck.pptx
@@ -3154,7 +3154,7 @@
               <a:defRPr sz="1300"/>
             </a:pPr>
             <a:r>
-              <a:t>• Covers MITG task order, DMID delivery order, modifications pipeline, budget posture, compliance, staffing, and Q1 recompete readiness</a:t>
+              <a:t>• Covers MITG task order, DMID delivery order, modifications pipeline, obligations posture, compliance, staffing, and Q1 recompete readiness</a:t>
             </a:r>
           </a:p>
           <a:p>
@@ -3232,15 +3232,23 @@
               <a:defRPr sz="1300"/>
             </a:pPr>
             <a:r>
-              <a:t>• Thursday EOD: GC decision on marketing spend</a:t>
-            </a:r>
-          </a:p>
-          <a:p>
-            <a:pPr>
-              <a:defRPr sz="1300"/>
-            </a:pPr>
-            <a:r>
-              <a:t>• Friday EOD: final Q3 budget approval; revised compliance scope due</a:t>
+              <a:t>• Wednesday EOD: Northwind data-call portion needed or we escalate further</a:t>
+            </a:r>
+          </a:p>
+          <a:p>
+            <a:pPr>
+              <a:defRPr sz="1300"/>
+            </a:pPr>
+            <a:r>
+              <a:t>• Thursday COB: Finance reconciliation complete for the data call</a:t>
+            </a:r>
+          </a:p>
+          <a:p>
+            <a:pPr>
+              <a:defRPr sz="1300"/>
+            </a:pPr>
+            <a:r>
+              <a:t>• Friday 3:00: OMB data call response submitted</a:t>
             </a:r>
           </a:p>
           <a:p>
@@ -3256,15 +3264,7 @@
               <a:defRPr sz="1300"/>
             </a:pPr>
             <a:r>
-              <a:t>• 9/30: MITG PoP (bridge extension filed)</a:t>
-            </a:r>
-          </a:p>
-          <a:p>
-            <a:pPr>
-              <a:defRPr sz="1300"/>
-            </a:pPr>
-            <a:r>
-              <a:t>• Q1 FY27: DMID recompete solicitation target</a:t>
+              <a:t>• 9/30: MITG PoP (bridge extension filed); Q1 FY27: DMID recompete solicitation target</a:t>
             </a:r>
           </a:p>
         </p:txBody>
@@ -3334,7 +3334,7 @@
               <a:defRPr sz="1300"/>
             </a:pPr>
             <a:r>
-              <a:t>• Endorse proceeding with non-marketing approvals now</a:t>
+              <a:t>• Awareness of the OMB data-call deadline risk and the Northwind escalation</a:t>
             </a:r>
           </a:p>
           <a:p>
@@ -3514,47 +3514,47 @@
               <a:defRPr sz="1300"/>
             </a:pPr>
             <a:r>
-              <a:t>• Overall status GREEN trending YELLOW on MITG due to open Mod #14 and compliance scope gap</a:t>
-            </a:r>
-          </a:p>
-          <a:p>
-            <a:pPr>
-              <a:defRPr sz="1300"/>
-            </a:pPr>
-            <a:r>
-              <a:t>• Budget 85% allocated for the quarter; marketing spend pending GC decision (Thursday EOD)</a:t>
-            </a:r>
-          </a:p>
-          <a:p>
-            <a:pPr>
-              <a:defRPr sz="1300"/>
-            </a:pPr>
-            <a:r>
-              <a:t>• Audit kickoff at risk of 1-2 week slip if scope revision runs long</a:t>
-            </a:r>
-          </a:p>
-          <a:p>
-            <a:pPr>
-              <a:defRPr sz="1300"/>
-            </a:pPr>
-            <a:r>
-              <a:t>• Bridge extension filed so MITG PoP does not lapse 9/30</a:t>
-            </a:r>
-          </a:p>
-          <a:p>
-            <a:pPr>
-              <a:defRPr sz="1300"/>
-            </a:pPr>
-            <a:r>
-              <a:t>• Q1 DMID recompete prep underway; Mod #14 precedent risk being tracked</a:t>
-            </a:r>
-          </a:p>
-          <a:p>
-            <a:pPr>
-              <a:defRPr sz="1300"/>
-            </a:pPr>
-            <a:r>
-              <a:t>• Three contracts within ceiling; one fully invoiced and closing (Tailspin)</a:t>
+              <a:t>• Overall status GREEN trending YELLOW on MITG due to open Mod #14 and the compliance scope gap</a:t>
+            </a:r>
+          </a:p>
+          <a:p>
+            <a:pPr>
+              <a:defRPr sz="1300"/>
+            </a:pPr>
+            <a:r>
+              <a:t>• Near-term pressure point: OMB data call due Friday — Northwind portion still outstanding</a:t>
+            </a:r>
+          </a:p>
+          <a:p>
+            <a:pPr>
+              <a:defRPr sz="1300"/>
+            </a:pPr>
+            <a:r>
+              <a:t>• Audit kickoff at risk of a 1-2 week slip if the scope revision runs long</a:t>
+            </a:r>
+          </a:p>
+          <a:p>
+            <a:pPr>
+              <a:defRPr sz="1300"/>
+            </a:pPr>
+            <a:r>
+              <a:t>• Bridge extension filed so the MITG PoP does not lapse 9/30</a:t>
+            </a:r>
+          </a:p>
+          <a:p>
+            <a:pPr>
+              <a:defRPr sz="1300"/>
+            </a:pPr>
+            <a:r>
+              <a:t>• DMID recompete planning underway; Mod #14 precedent risk being tracked</a:t>
+            </a:r>
+          </a:p>
+          <a:p>
+            <a:pPr>
+              <a:defRPr sz="1300"/>
+            </a:pPr>
+            <a:r>
+              <a:t>• Three active contracts within ceiling; Tailspin fully invoiced and closing</a:t>
             </a:r>
           </a:p>
           <a:p>
@@ -3570,7 +3570,7 @@
               <a:defRPr sz="1300"/>
             </a:pPr>
             <a:r>
-              <a:t>• No critical issues requiring leadership decision this week except marketing GC sign-off</a:t>
+              <a:t>• No leadership decision required this week beyond awareness of the data-call risk</a:t>
             </a:r>
           </a:p>
         </p:txBody>
@@ -3664,15 +3664,15 @@
               <a:defRPr sz="1300"/>
             </a:pPr>
             <a:r>
-              <a:t>• Compliance review in progress, expected clear Monday with phased-start condition</a:t>
-            </a:r>
-          </a:p>
-          <a:p>
-            <a:pPr>
-              <a:defRPr sz="1300"/>
-            </a:pPr>
-            <a:r>
-              <a:t>• Risk: at ~88-92% of ceiling depending on option; funding action may be needed if scope grows</a:t>
+              <a:t>• Compliance review in progress, expected to clear Monday with a phased-start condition</a:t>
+            </a:r>
+          </a:p>
+          <a:p>
+            <a:pPr>
+              <a:defRPr sz="1300"/>
+            </a:pPr>
+            <a:r>
+              <a:t>• Risk: nearing ceiling depending on the option; a funding action may be needed if scope grows</a:t>
             </a:r>
           </a:p>
           <a:p>
@@ -3766,15 +3766,15 @@
               <a:defRPr sz="1300"/>
             </a:pPr>
             <a:r>
-              <a:t>• Recompete planning for Q1 — market research underway, draft PWS in progress</a:t>
-            </a:r>
-          </a:p>
-          <a:p>
-            <a:pPr>
-              <a:defRPr sz="1300"/>
-            </a:pPr>
-            <a:r>
-              <a:t>• Risk: Mod #14 on MITG could set a precedent we don't want to carry into the recompete</a:t>
+              <a:t>• Recompete planning underway — sources-sought posted, six responses, draft PWS ~80%</a:t>
+            </a:r>
+          </a:p>
+          <a:p>
+            <a:pPr>
+              <a:defRPr sz="1300"/>
+            </a:pPr>
+            <a:r>
+              <a:t>• Risk: Mod #14 on MITG could set a precedent we do not want to carry into the recompete</a:t>
             </a:r>
           </a:p>
           <a:p>
@@ -3931,7 +3931,7 @@
           <a:lstStyle/>
           <a:p>
             <a:r>
-              <a:t>Budget Posture</a:t>
+              <a:t>Budget &amp; Obligations</a:t>
             </a:r>
           </a:p>
         </p:txBody>
@@ -3962,31 +3962,31 @@
               <a:defRPr sz="1300"/>
             </a:pPr>
             <a:r>
-              <a:t>• Q3 allocations 85% complete; final approval expected Friday EOD</a:t>
-            </a:r>
-          </a:p>
-          <a:p>
-            <a:pPr>
-              <a:defRPr sz="1300"/>
-            </a:pPr>
-            <a:r>
-              <a:t>• Infrastructure $45K approved; HR training $20K approved; Marketing $60K pending GC</a:t>
-            </a:r>
-          </a:p>
-          <a:p>
-            <a:pPr>
-              <a:defRPr sz="1300"/>
-            </a:pPr>
-            <a:r>
-              <a:t>• Monthly actuals tracking within +/-18% of plan across three active contracts</a:t>
-            </a:r>
-          </a:p>
-          <a:p>
-            <a:pPr>
-              <a:defRPr sz="1300"/>
-            </a:pPr>
-            <a:r>
-              <a:t>• MITG nearing ceiling — monitor obligations against Mod #14 option chosen</a:t>
+              <a:t>• MITG obligated ~89% of the $2.45M ceiling; Mod #14 adds $163K — monitor against ceiling</a:t>
+            </a:r>
+          </a:p>
+          <a:p>
+            <a:pPr>
+              <a:defRPr sz="1300"/>
+            </a:pPr>
+            <a:r>
+              <a:t>• DMID fully obligated; $0.37M remaining to invoice through 3/31/2027</a:t>
+            </a:r>
+          </a:p>
+          <a:p>
+            <a:pPr>
+              <a:defRPr sz="1300"/>
+            </a:pPr>
+            <a:r>
+              <a:t>• Fabrikam (MITG-2024-009) ~62% obligated; on track</a:t>
+            </a:r>
+          </a:p>
+          <a:p>
+            <a:pPr>
+              <a:defRPr sz="1300"/>
+            </a:pPr>
+            <a:r>
+              <a:t>• Monthly actuals tracking within +/-18% of plan across active contracts</a:t>
             </a:r>
           </a:p>
           <a:p>
@@ -4096,7 +4096,7 @@
               <a:defRPr sz="1300"/>
             </a:pPr>
             <a:r>
-              <a:t>• No open findings from prior period</a:t>
+              <a:t>• No open findings from the prior period</a:t>
             </a:r>
           </a:p>
         </p:txBody>
@@ -4268,7 +4268,7 @@
               <a:defRPr sz="1300"/>
             </a:pPr>
             <a:r>
-              <a:t>• Legal/GC decision on marketing spend could slip past Thursday (budget impact)</a:t>
+              <a:t>• OMB data call: Northwind portion outstanding — deadline risk for Friday</a:t>
             </a:r>
           </a:p>
           <a:p>
@@ -4300,7 +4300,7 @@
               <a:defRPr sz="1300"/>
             </a:pPr>
             <a:r>
-              <a:t>• Mitigations in place for each; none require board action except GC follow-up</a:t>
+              <a:t>• Mitigations in place for each; none require board action except the data-call escalation</a:t>
             </a:r>
           </a:p>
         </p:txBody>
